--- a/Month-02-Entra-ID-Hybrid-AD-and-Okta/Week-06-Entra-ID-Core/W6_Entra_ID_Core.pptx
+++ b/Month-02-Entra-ID-Hybrid-AD-and-Okta/Week-06-Entra-ID-Core/W6_Entra_ID_Core.pptx
@@ -2192,7 +2192,7 @@
         <p:spPr>
           <a:xfrm>
             <a:off x="640080" y="4206240"/>
-            <a:ext cx="9144000" cy="457200"/>
+            <a:ext cx="10515600" cy="457200"/>
           </a:xfrm>
           <a:prstGeom prst="rect">
             <a:avLst/>
@@ -3679,12 +3679,12 @@
         </p:nvSpPr>
         <p:spPr>
           <a:xfrm>
-            <a:off x="548640" y="1572768"/>
-            <a:ext cx="5440680" cy="2194560"/>
+            <a:off x="548640" y="1984248"/>
+            <a:ext cx="5440680" cy="1828800"/>
           </a:xfrm>
           <a:prstGeom prst="roundRect">
             <a:avLst>
-              <a:gd name="adj" fmla="val 2917"/>
+              <a:gd name="adj" fmla="val 3500"/>
             </a:avLst>
           </a:prstGeom>
           <a:solidFill>
@@ -3713,13 +3713,11 @@
         </p:nvSpPr>
         <p:spPr>
           <a:xfrm>
-            <a:off x="548640" y="1572768"/>
-            <a:ext cx="128016" cy="2194560"/>
-          </a:xfrm>
-          <a:prstGeom prst="roundRect">
-            <a:avLst>
-              <a:gd name="adj" fmla="val 35714"/>
-            </a:avLst>
+            <a:off x="841248" y="2240280"/>
+            <a:ext cx="182880" cy="182880"/>
+          </a:xfrm>
+          <a:prstGeom prst="ellipse">
+            <a:avLst/>
           </a:prstGeom>
           <a:solidFill>
             <a:srgbClr val="1766C4"/>
@@ -3735,8 +3733,8 @@
         </p:nvSpPr>
         <p:spPr>
           <a:xfrm>
-            <a:off x="841248" y="1700784"/>
-            <a:ext cx="4983480" cy="411480"/>
+            <a:off x="1152144" y="2130552"/>
+            <a:ext cx="4663440" cy="411480"/>
           </a:xfrm>
           <a:prstGeom prst="rect">
             <a:avLst/>
@@ -3771,8 +3769,8 @@
         </p:nvSpPr>
         <p:spPr>
           <a:xfrm>
-            <a:off x="841248" y="2121408"/>
-            <a:ext cx="4937760" cy="1536192"/>
+            <a:off x="859536" y="2642616"/>
+            <a:ext cx="4892040" cy="1042416"/>
           </a:xfrm>
           <a:prstGeom prst="rect">
             <a:avLst/>
@@ -3786,7 +3784,7 @@
           <a:p>
             <a:pPr indent="0" marL="0">
               <a:lnSpc>
-                <a:spcPct val="102000"/>
+                <a:spcPct val="105000"/>
               </a:lnSpc>
               <a:buNone/>
             </a:pPr>
@@ -3810,12 +3808,12 @@
         </p:nvSpPr>
         <p:spPr>
           <a:xfrm>
-            <a:off x="6309360" y="1572768"/>
-            <a:ext cx="5440680" cy="2194560"/>
+            <a:off x="6309360" y="1984248"/>
+            <a:ext cx="5440680" cy="1828800"/>
           </a:xfrm>
           <a:prstGeom prst="roundRect">
             <a:avLst>
-              <a:gd name="adj" fmla="val 2917"/>
+              <a:gd name="adj" fmla="val 3500"/>
             </a:avLst>
           </a:prstGeom>
           <a:solidFill>
@@ -3844,13 +3842,11 @@
         </p:nvSpPr>
         <p:spPr>
           <a:xfrm>
-            <a:off x="6309360" y="1572768"/>
-            <a:ext cx="128016" cy="2194560"/>
-          </a:xfrm>
-          <a:prstGeom prst="roundRect">
-            <a:avLst>
-              <a:gd name="adj" fmla="val 35714"/>
-            </a:avLst>
+            <a:off x="6601968" y="2240280"/>
+            <a:ext cx="182880" cy="182880"/>
+          </a:xfrm>
+          <a:prstGeom prst="ellipse">
+            <a:avLst/>
           </a:prstGeom>
           <a:solidFill>
             <a:srgbClr val="1766C4"/>
@@ -3866,8 +3862,8 @@
         </p:nvSpPr>
         <p:spPr>
           <a:xfrm>
-            <a:off x="6601968" y="1700784"/>
-            <a:ext cx="4983480" cy="411480"/>
+            <a:off x="6912864" y="2130552"/>
+            <a:ext cx="4663440" cy="411480"/>
           </a:xfrm>
           <a:prstGeom prst="rect">
             <a:avLst/>
@@ -3902,8 +3898,8 @@
         </p:nvSpPr>
         <p:spPr>
           <a:xfrm>
-            <a:off x="6601968" y="2121408"/>
-            <a:ext cx="4937760" cy="1536192"/>
+            <a:off x="6620256" y="2642616"/>
+            <a:ext cx="4892040" cy="1042416"/>
           </a:xfrm>
           <a:prstGeom prst="rect">
             <a:avLst/>
@@ -3917,7 +3913,7 @@
           <a:p>
             <a:pPr indent="0" marL="0">
               <a:lnSpc>
-                <a:spcPct val="102000"/>
+                <a:spcPct val="105000"/>
               </a:lnSpc>
               <a:buNone/>
             </a:pPr>
@@ -3941,12 +3937,12 @@
         </p:nvSpPr>
         <p:spPr>
           <a:xfrm>
-            <a:off x="548640" y="3968496"/>
-            <a:ext cx="5440680" cy="2194560"/>
+            <a:off x="548640" y="4087368"/>
+            <a:ext cx="5440680" cy="1828800"/>
           </a:xfrm>
           <a:prstGeom prst="roundRect">
             <a:avLst>
-              <a:gd name="adj" fmla="val 2917"/>
+              <a:gd name="adj" fmla="val 3500"/>
             </a:avLst>
           </a:prstGeom>
           <a:solidFill>
@@ -3975,13 +3971,11 @@
         </p:nvSpPr>
         <p:spPr>
           <a:xfrm>
-            <a:off x="548640" y="3968496"/>
-            <a:ext cx="128016" cy="2194560"/>
-          </a:xfrm>
-          <a:prstGeom prst="roundRect">
-            <a:avLst>
-              <a:gd name="adj" fmla="val 35714"/>
-            </a:avLst>
+            <a:off x="841248" y="4343400"/>
+            <a:ext cx="182880" cy="182880"/>
+          </a:xfrm>
+          <a:prstGeom prst="ellipse">
+            <a:avLst/>
           </a:prstGeom>
           <a:solidFill>
             <a:srgbClr val="1766C4"/>
@@ -3997,8 +3991,8 @@
         </p:nvSpPr>
         <p:spPr>
           <a:xfrm>
-            <a:off x="841248" y="4096512"/>
-            <a:ext cx="4983480" cy="411480"/>
+            <a:off x="1152144" y="4233672"/>
+            <a:ext cx="4663440" cy="411480"/>
           </a:xfrm>
           <a:prstGeom prst="rect">
             <a:avLst/>
@@ -4033,8 +4027,8 @@
         </p:nvSpPr>
         <p:spPr>
           <a:xfrm>
-            <a:off x="841248" y="4517136"/>
-            <a:ext cx="4937760" cy="1536192"/>
+            <a:off x="859536" y="4745736"/>
+            <a:ext cx="4892040" cy="1042416"/>
           </a:xfrm>
           <a:prstGeom prst="rect">
             <a:avLst/>
@@ -4048,7 +4042,7 @@
           <a:p>
             <a:pPr indent="0" marL="0">
               <a:lnSpc>
-                <a:spcPct val="102000"/>
+                <a:spcPct val="105000"/>
               </a:lnSpc>
               <a:buNone/>
             </a:pPr>
@@ -4072,12 +4066,12 @@
         </p:nvSpPr>
         <p:spPr>
           <a:xfrm>
-            <a:off x="6309360" y="3968496"/>
-            <a:ext cx="5440680" cy="2194560"/>
+            <a:off x="6309360" y="4087368"/>
+            <a:ext cx="5440680" cy="1828800"/>
           </a:xfrm>
           <a:prstGeom prst="roundRect">
             <a:avLst>
-              <a:gd name="adj" fmla="val 2917"/>
+              <a:gd name="adj" fmla="val 3500"/>
             </a:avLst>
           </a:prstGeom>
           <a:solidFill>
@@ -4106,13 +4100,11 @@
         </p:nvSpPr>
         <p:spPr>
           <a:xfrm>
-            <a:off x="6309360" y="3968496"/>
-            <a:ext cx="128016" cy="2194560"/>
-          </a:xfrm>
-          <a:prstGeom prst="roundRect">
-            <a:avLst>
-              <a:gd name="adj" fmla="val 35714"/>
-            </a:avLst>
+            <a:off x="6601968" y="4343400"/>
+            <a:ext cx="182880" cy="182880"/>
+          </a:xfrm>
+          <a:prstGeom prst="ellipse">
+            <a:avLst/>
           </a:prstGeom>
           <a:solidFill>
             <a:srgbClr val="1766C4"/>
@@ -4128,8 +4120,8 @@
         </p:nvSpPr>
         <p:spPr>
           <a:xfrm>
-            <a:off x="6601968" y="4096512"/>
-            <a:ext cx="4983480" cy="411480"/>
+            <a:off x="6912864" y="4233672"/>
+            <a:ext cx="4663440" cy="411480"/>
           </a:xfrm>
           <a:prstGeom prst="rect">
             <a:avLst/>
@@ -4164,8 +4156,8 @@
         </p:nvSpPr>
         <p:spPr>
           <a:xfrm>
-            <a:off x="6601968" y="4517136"/>
-            <a:ext cx="4937760" cy="1536192"/>
+            <a:off x="6620256" y="4745736"/>
+            <a:ext cx="4892040" cy="1042416"/>
           </a:xfrm>
           <a:prstGeom prst="rect">
             <a:avLst/>
@@ -4179,7 +4171,7 @@
           <a:p>
             <a:pPr indent="0" marL="0">
               <a:lnSpc>
-                <a:spcPct val="102000"/>
+                <a:spcPct val="105000"/>
               </a:lnSpc>
               <a:buNone/>
             </a:pPr>
@@ -6318,10 +6310,10 @@
         </p:nvSpPr>
         <p:spPr>
           <a:xfrm>
-            <a:off x="6400800" y="2377440"/>
-            <a:ext cx="91440" cy="676656"/>
-          </a:xfrm>
-          <a:prstGeom prst="rect">
+            <a:off x="6601968" y="2560320"/>
+            <a:ext cx="310896" cy="310896"/>
+          </a:xfrm>
+          <a:prstGeom prst="ellipse">
             <a:avLst/>
           </a:prstGeom>
           <a:solidFill>
@@ -6338,8 +6330,8 @@
         </p:nvSpPr>
         <p:spPr>
           <a:xfrm>
-            <a:off x="6510528" y="2377440"/>
-            <a:ext cx="457200" cy="676656"/>
+            <a:off x="6601968" y="2560320"/>
+            <a:ext cx="310896" cy="310896"/>
           </a:xfrm>
           <a:prstGeom prst="rect">
             <a:avLst/>
@@ -6355,14 +6347,14 @@
               <a:buNone/>
             </a:pPr>
             <a:r>
-              <a:rPr lang="en-US" sz="1600" dirty="0">
-                <a:solidFill>
-                  <a:srgbClr val="17C3B2"/>
-                </a:solidFill>
-              </a:rPr>
-              <a:t>☑</a:t>
-            </a:r>
-            <a:endParaRPr lang="en-US" sz="1600" dirty="0"/>
+              <a:rPr lang="en-US" sz="1400" b="1" dirty="0">
+                <a:solidFill>
+                  <a:srgbClr val="FFFFFF"/>
+                </a:solidFill>
+              </a:rPr>
+              <a:t>✓</a:t>
+            </a:r>
+            <a:endParaRPr lang="en-US" sz="1400" dirty="0"/>
           </a:p>
         </p:txBody>
       </p:sp>
@@ -6437,10 +6429,10 @@
         </p:nvSpPr>
         <p:spPr>
           <a:xfrm>
-            <a:off x="6400800" y="3182112"/>
-            <a:ext cx="91440" cy="676656"/>
-          </a:xfrm>
-          <a:prstGeom prst="rect">
+            <a:off x="6601968" y="3364992"/>
+            <a:ext cx="310896" cy="310896"/>
+          </a:xfrm>
+          <a:prstGeom prst="ellipse">
             <a:avLst/>
           </a:prstGeom>
           <a:solidFill>
@@ -6457,8 +6449,8 @@
         </p:nvSpPr>
         <p:spPr>
           <a:xfrm>
-            <a:off x="6510528" y="3182112"/>
-            <a:ext cx="457200" cy="676656"/>
+            <a:off x="6601968" y="3364992"/>
+            <a:ext cx="310896" cy="310896"/>
           </a:xfrm>
           <a:prstGeom prst="rect">
             <a:avLst/>
@@ -6474,14 +6466,14 @@
               <a:buNone/>
             </a:pPr>
             <a:r>
-              <a:rPr lang="en-US" sz="1600" dirty="0">
-                <a:solidFill>
-                  <a:srgbClr val="17C3B2"/>
-                </a:solidFill>
-              </a:rPr>
-              <a:t>☑</a:t>
-            </a:r>
-            <a:endParaRPr lang="en-US" sz="1600" dirty="0"/>
+              <a:rPr lang="en-US" sz="1400" b="1" dirty="0">
+                <a:solidFill>
+                  <a:srgbClr val="FFFFFF"/>
+                </a:solidFill>
+              </a:rPr>
+              <a:t>✓</a:t>
+            </a:r>
+            <a:endParaRPr lang="en-US" sz="1400" dirty="0"/>
           </a:p>
         </p:txBody>
       </p:sp>
@@ -6556,10 +6548,10 @@
         </p:nvSpPr>
         <p:spPr>
           <a:xfrm>
-            <a:off x="6400800" y="3986784"/>
-            <a:ext cx="91440" cy="676656"/>
-          </a:xfrm>
-          <a:prstGeom prst="rect">
+            <a:off x="6601968" y="4169664"/>
+            <a:ext cx="310896" cy="310896"/>
+          </a:xfrm>
+          <a:prstGeom prst="ellipse">
             <a:avLst/>
           </a:prstGeom>
           <a:solidFill>
@@ -6576,8 +6568,8 @@
         </p:nvSpPr>
         <p:spPr>
           <a:xfrm>
-            <a:off x="6510528" y="3986784"/>
-            <a:ext cx="457200" cy="676656"/>
+            <a:off x="6601968" y="4169664"/>
+            <a:ext cx="310896" cy="310896"/>
           </a:xfrm>
           <a:prstGeom prst="rect">
             <a:avLst/>
@@ -6593,14 +6585,14 @@
               <a:buNone/>
             </a:pPr>
             <a:r>
-              <a:rPr lang="en-US" sz="1600" dirty="0">
-                <a:solidFill>
-                  <a:srgbClr val="17C3B2"/>
-                </a:solidFill>
-              </a:rPr>
-              <a:t>☑</a:t>
-            </a:r>
-            <a:endParaRPr lang="en-US" sz="1600" dirty="0"/>
+              <a:rPr lang="en-US" sz="1400" b="1" dirty="0">
+                <a:solidFill>
+                  <a:srgbClr val="FFFFFF"/>
+                </a:solidFill>
+              </a:rPr>
+              <a:t>✓</a:t>
+            </a:r>
+            <a:endParaRPr lang="en-US" sz="1400" dirty="0"/>
           </a:p>
         </p:txBody>
       </p:sp>
@@ -6675,10 +6667,10 @@
         </p:nvSpPr>
         <p:spPr>
           <a:xfrm>
-            <a:off x="6400800" y="4791456"/>
-            <a:ext cx="91440" cy="676656"/>
-          </a:xfrm>
-          <a:prstGeom prst="rect">
+            <a:off x="6601968" y="4974336"/>
+            <a:ext cx="310896" cy="310896"/>
+          </a:xfrm>
+          <a:prstGeom prst="ellipse">
             <a:avLst/>
           </a:prstGeom>
           <a:solidFill>
@@ -6695,8 +6687,8 @@
         </p:nvSpPr>
         <p:spPr>
           <a:xfrm>
-            <a:off x="6510528" y="4791456"/>
-            <a:ext cx="457200" cy="676656"/>
+            <a:off x="6601968" y="4974336"/>
+            <a:ext cx="310896" cy="310896"/>
           </a:xfrm>
           <a:prstGeom prst="rect">
             <a:avLst/>
@@ -6712,14 +6704,14 @@
               <a:buNone/>
             </a:pPr>
             <a:r>
-              <a:rPr lang="en-US" sz="1600" dirty="0">
-                <a:solidFill>
-                  <a:srgbClr val="17C3B2"/>
-                </a:solidFill>
-              </a:rPr>
-              <a:t>☑</a:t>
-            </a:r>
-            <a:endParaRPr lang="en-US" sz="1600" dirty="0"/>
+              <a:rPr lang="en-US" sz="1400" b="1" dirty="0">
+                <a:solidFill>
+                  <a:srgbClr val="FFFFFF"/>
+                </a:solidFill>
+              </a:rPr>
+              <a:t>✓</a:t>
+            </a:r>
+            <a:endParaRPr lang="en-US" sz="1400" dirty="0"/>
           </a:p>
         </p:txBody>
       </p:sp>
@@ -7293,7 +7285,7 @@
         </p:nvSpPr>
         <p:spPr>
           <a:xfrm>
-            <a:off x="594360" y="2980944"/>
+            <a:off x="594360" y="3118104"/>
             <a:ext cx="146304" cy="146304"/>
           </a:xfrm>
           <a:prstGeom prst="ellipse">
@@ -7314,7 +7306,7 @@
         <p:spPr>
           <a:xfrm>
             <a:off x="868680" y="2926080"/>
-            <a:ext cx="5074920" cy="548640"/>
+            <a:ext cx="5074920" cy="530352"/>
           </a:xfrm>
           <a:prstGeom prst="rect">
             <a:avLst/>
@@ -7349,7 +7341,7 @@
         </p:nvSpPr>
         <p:spPr>
           <a:xfrm>
-            <a:off x="594360" y="3547872"/>
+            <a:off x="594360" y="3685032"/>
             <a:ext cx="146304" cy="146304"/>
           </a:xfrm>
           <a:prstGeom prst="ellipse">
@@ -7370,7 +7362,7 @@
         <p:spPr>
           <a:xfrm>
             <a:off x="868680" y="3493008"/>
-            <a:ext cx="5074920" cy="548640"/>
+            <a:ext cx="5074920" cy="530352"/>
           </a:xfrm>
           <a:prstGeom prst="rect">
             <a:avLst/>
@@ -7405,7 +7397,7 @@
         </p:nvSpPr>
         <p:spPr>
           <a:xfrm>
-            <a:off x="594360" y="4114800"/>
+            <a:off x="594360" y="4251960"/>
             <a:ext cx="146304" cy="146304"/>
           </a:xfrm>
           <a:prstGeom prst="ellipse">
@@ -7426,7 +7418,7 @@
         <p:spPr>
           <a:xfrm>
             <a:off x="868680" y="4059936"/>
-            <a:ext cx="5074920" cy="548640"/>
+            <a:ext cx="5074920" cy="530352"/>
           </a:xfrm>
           <a:prstGeom prst="rect">
             <a:avLst/>
@@ -7461,7 +7453,7 @@
         </p:nvSpPr>
         <p:spPr>
           <a:xfrm>
-            <a:off x="594360" y="4681728"/>
+            <a:off x="594360" y="4818888"/>
             <a:ext cx="146304" cy="146304"/>
           </a:xfrm>
           <a:prstGeom prst="ellipse">
@@ -7482,7 +7474,7 @@
         <p:spPr>
           <a:xfrm>
             <a:off x="868680" y="4626864"/>
-            <a:ext cx="5074920" cy="548640"/>
+            <a:ext cx="5074920" cy="530352"/>
           </a:xfrm>
           <a:prstGeom prst="rect">
             <a:avLst/>
@@ -7517,7 +7509,7 @@
         </p:nvSpPr>
         <p:spPr>
           <a:xfrm>
-            <a:off x="594360" y="5248656"/>
+            <a:off x="594360" y="5385816"/>
             <a:ext cx="146304" cy="146304"/>
           </a:xfrm>
           <a:prstGeom prst="ellipse">
@@ -7538,7 +7530,7 @@
         <p:spPr>
           <a:xfrm>
             <a:off x="868680" y="5193792"/>
-            <a:ext cx="5074920" cy="548640"/>
+            <a:ext cx="5074920" cy="530352"/>
           </a:xfrm>
           <a:prstGeom prst="rect">
             <a:avLst/>
@@ -7573,7 +7565,7 @@
         </p:nvSpPr>
         <p:spPr>
           <a:xfrm>
-            <a:off x="594360" y="5815584"/>
+            <a:off x="594360" y="5952744"/>
             <a:ext cx="146304" cy="146304"/>
           </a:xfrm>
           <a:prstGeom prst="ellipse">
@@ -7594,7 +7586,7 @@
         <p:spPr>
           <a:xfrm>
             <a:off x="868680" y="5760720"/>
-            <a:ext cx="5074920" cy="548640"/>
+            <a:ext cx="5074920" cy="530352"/>
           </a:xfrm>
           <a:prstGeom prst="rect">
             <a:avLst/>
